--- a/11а клас/РС/7. Свързване на приложения с бази от данни/01. Увод в приложенията с бази данни.pptx
+++ b/11а клас/РС/7. Свързване на приложения с бази от данни/01. Увод в приложенията с бази данни.pptx
@@ -21,6 +21,8 @@
     <p:sldId id="635" r:id="rId12"/>
     <p:sldId id="636" r:id="rId13"/>
     <p:sldId id="572" r:id="rId14"/>
+    <p:sldId id="637" r:id="rId23"/>
+    <p:sldId id="638" r:id="rId24"/>
   </p:sldIdLst>
   <p:sldSz cx="12192000" cy="6858000"/>
   <p:notesSz cx="6858000" cy="9144000"/>
@@ -1487,7 +1489,9 @@
           <a:bodyPr/>
           <a:lstStyle/>
           <a:p>
-            <a:endParaRPr lang="bg-BG"/>
+            <a:r>
+              <a:t>Покажете съдържанието. Два подхода: директен (ADO.NET) и абстрактен (ORM). Аналогия: ръчна vs автоматична скоростна кутия.</a:t>
+            </a:r>
           </a:p>
         </p:txBody>
       </p:sp>
@@ -1623,175 +1627,9 @@
           <a:bodyPr/>
           <a:lstStyle/>
           <a:p>
-            <a:pPr lvl="0"/>
-            <a:r>
-              <a:rPr lang="bg-BG" sz="1200" kern="1200" dirty="0" smtClean="0">
-                <a:solidFill>
-                  <a:schemeClr val="tx1"/>
-                </a:solidFill>
-                <a:effectLst/>
-                <a:latin typeface="+mn-lt"/>
-                <a:ea typeface="+mn-ea"/>
-                <a:cs typeface="+mn-cs"/>
-              </a:rPr>
-              <a:t>EFC е ORM работна рамка, чрез която създаваме модел, отваряме обектен контекст, извличаме данни чрез LINQ и запазваме промените.</a:t>
-            </a:r>
-            <a:endParaRPr lang="bg-BG" sz="1100" kern="1200" dirty="0" smtClean="0">
-              <a:solidFill>
-                <a:schemeClr val="tx1"/>
-              </a:solidFill>
-              <a:effectLst/>
-              <a:latin typeface="+mn-lt"/>
-              <a:ea typeface="+mn-ea"/>
-              <a:cs typeface="+mn-cs"/>
-            </a:endParaRPr>
-          </a:p>
-          <a:p>
-            <a:pPr lvl="0"/>
-            <a:r>
-              <a:rPr lang="bg-BG" sz="1200" b="1" kern="1200" dirty="0" smtClean="0">
-                <a:solidFill>
-                  <a:schemeClr val="tx1"/>
-                </a:solidFill>
-                <a:effectLst/>
-                <a:latin typeface="+mn-lt"/>
-                <a:ea typeface="+mn-ea"/>
-                <a:cs typeface="+mn-cs"/>
-              </a:rPr>
-              <a:t>Обяснение за ученици:</a:t>
-            </a:r>
-            <a:r>
-              <a:rPr lang="bg-BG" sz="1200" kern="1200" dirty="0" smtClean="0">
-                <a:solidFill>
-                  <a:schemeClr val="tx1"/>
-                </a:solidFill>
-                <a:effectLst/>
-                <a:latin typeface="+mn-lt"/>
-                <a:ea typeface="+mn-ea"/>
-                <a:cs typeface="+mn-cs"/>
-              </a:rPr>
-              <a:t> Това е най-известният "преводач" (ORM) за C#. Работата с него е като да редактирате текстов файл.</a:t>
-            </a:r>
-            <a:endParaRPr lang="bg-BG" sz="1100" kern="1200" dirty="0" smtClean="0">
-              <a:solidFill>
-                <a:schemeClr val="tx1"/>
-              </a:solidFill>
-              <a:effectLst/>
-              <a:latin typeface="+mn-lt"/>
-              <a:ea typeface="+mn-ea"/>
-              <a:cs typeface="+mn-cs"/>
-            </a:endParaRPr>
-          </a:p>
-          <a:p>
-            <a:pPr lvl="1"/>
-            <a:r>
-              <a:rPr lang="bg-BG" sz="1200" b="1" kern="1200" dirty="0" smtClean="0">
-                <a:solidFill>
-                  <a:schemeClr val="tx1"/>
-                </a:solidFill>
-                <a:effectLst/>
-                <a:latin typeface="+mn-lt"/>
-                <a:ea typeface="+mn-ea"/>
-                <a:cs typeface="+mn-cs"/>
-              </a:rPr>
-              <a:t>Отваряте контекст:</a:t>
-            </a:r>
-            <a:r>
-              <a:rPr lang="bg-BG" sz="1200" kern="1200" dirty="0" smtClean="0">
-                <a:solidFill>
-                  <a:schemeClr val="tx1"/>
-                </a:solidFill>
-                <a:effectLst/>
-                <a:latin typeface="+mn-lt"/>
-                <a:ea typeface="+mn-ea"/>
-                <a:cs typeface="+mn-cs"/>
-              </a:rPr>
-              <a:t> Това е като да отворите файла.</a:t>
-            </a:r>
-            <a:endParaRPr lang="bg-BG" sz="1100" kern="1200" dirty="0" smtClean="0">
-              <a:solidFill>
-                <a:schemeClr val="tx1"/>
-              </a:solidFill>
-              <a:effectLst/>
-              <a:latin typeface="+mn-lt"/>
-              <a:ea typeface="+mn-ea"/>
-              <a:cs typeface="+mn-cs"/>
-            </a:endParaRPr>
-          </a:p>
-          <a:p>
-            <a:pPr lvl="1"/>
-            <a:r>
-              <a:rPr lang="bg-BG" sz="1200" b="1" kern="1200" dirty="0" smtClean="0">
-                <a:solidFill>
-                  <a:schemeClr val="tx1"/>
-                </a:solidFill>
-                <a:effectLst/>
-                <a:latin typeface="+mn-lt"/>
-                <a:ea typeface="+mn-ea"/>
-                <a:cs typeface="+mn-cs"/>
-              </a:rPr>
-              <a:t>Правите промени:</a:t>
-            </a:r>
-            <a:r>
-              <a:rPr lang="bg-BG" sz="1200" kern="1200" dirty="0" smtClean="0">
-                <a:solidFill>
-                  <a:schemeClr val="tx1"/>
-                </a:solidFill>
-                <a:effectLst/>
-                <a:latin typeface="+mn-lt"/>
-                <a:ea typeface="+mn-ea"/>
-                <a:cs typeface="+mn-cs"/>
-              </a:rPr>
-              <a:t> Четете данни, триете ученик, добавяте нов (използвайки LINQ). Всичко това се случва само в паметта на компютъра!</a:t>
-            </a:r>
-            <a:endParaRPr lang="bg-BG" sz="1100" kern="1200" dirty="0" smtClean="0">
-              <a:solidFill>
-                <a:schemeClr val="tx1"/>
-              </a:solidFill>
-              <a:effectLst/>
-              <a:latin typeface="+mn-lt"/>
-              <a:ea typeface="+mn-ea"/>
-              <a:cs typeface="+mn-cs"/>
-            </a:endParaRPr>
-          </a:p>
-          <a:p>
-            <a:pPr lvl="1"/>
-            <a:r>
-              <a:rPr lang="bg-BG" sz="1200" b="1" kern="1200" dirty="0" smtClean="0">
-                <a:solidFill>
-                  <a:schemeClr val="tx1"/>
-                </a:solidFill>
-                <a:effectLst/>
-                <a:latin typeface="+mn-lt"/>
-                <a:ea typeface="+mn-ea"/>
-                <a:cs typeface="+mn-cs"/>
-              </a:rPr>
-              <a:t>Запазвате (Save):</a:t>
-            </a:r>
-            <a:r>
-              <a:rPr lang="bg-BG" sz="1200" kern="1200" dirty="0" smtClean="0">
-                <a:solidFill>
-                  <a:schemeClr val="tx1"/>
-                </a:solidFill>
-                <a:effectLst/>
-                <a:latin typeface="+mn-lt"/>
-                <a:ea typeface="+mn-ea"/>
-                <a:cs typeface="+mn-cs"/>
-              </a:rPr>
-              <a:t> Когато извикате запазването, EFC превежда всичките ви действия наведнъж и ги праща в базата данни. Връзката се управлява автоматично – EFC сам "вдига телефона", предава данните и го "затваря".</a:t>
-            </a:r>
-            <a:endParaRPr lang="bg-BG" sz="1100" kern="1200" dirty="0" smtClean="0">
-              <a:solidFill>
-                <a:schemeClr val="tx1"/>
-              </a:solidFill>
-              <a:effectLst/>
-              <a:latin typeface="+mn-lt"/>
-              <a:ea typeface="+mn-ea"/>
-              <a:cs typeface="+mn-cs"/>
-            </a:endParaRPr>
-          </a:p>
-          <a:p>
-            <a:endParaRPr lang="en-US" dirty="0"/>
+            <a:r>
+              <a:t>ЕFC е официалният ORM на Microsoft. Code-First: C# класове -&gt; SQL. Database-First: съществуваща БД -&gt; C# класове.</a:t>
+            </a:r>
           </a:p>
         </p:txBody>
       </p:sp>
@@ -1900,6 +1738,216 @@
         <p14:creationId xmlns:p14="http://schemas.microsoft.com/office/powerpoint/2010/main" val="1204322320"/>
       </p:ext>
     </p:extLst>
+  </p:cSld>
+  <p:clrMapOvr>
+    <a:masterClrMapping/>
+  </p:clrMapOvr>
+</p:notes>
+</file>
+
+<file path=ppt/notesSlides/notesSlide11.xml><?xml version="1.0" encoding="utf-8"?>
+<p:notes xmlns:a="http://schemas.openxmlformats.org/drawingml/2006/main" xmlns:p="http://schemas.openxmlformats.org/presentationml/2006/main" xmlns:r="http://schemas.openxmlformats.org/officeDocument/2006/relationships">
+  <p:cSld>
+    <p:spTree>
+      <p:nvGrpSpPr>
+        <p:cNvPr id="1" name=""/>
+        <p:cNvGrpSpPr/>
+        <p:nvPr/>
+      </p:nvGrpSpPr>
+      <p:grpSpPr>
+        <a:xfrm>
+          <a:off x="0" y="0"/>
+          <a:ext cx="0" cy="0"/>
+          <a:chOff x="0" y="0"/>
+          <a:chExt cx="0" cy="0"/>
+        </a:xfrm>
+      </p:grpSpPr>
+      <p:sp>
+        <p:nvSpPr>
+          <p:cNvPr id="2" name="Slide Image Placeholder 1"/>
+          <p:cNvSpPr>
+            <a:spLocks noGrp="1"/>
+          </p:cNvSpPr>
+          <p:nvPr>
+            <p:ph type="sldImg" idx="2"/>
+          </p:nvPr>
+        </p:nvSpPr>
+        <p:spPr/>
+      </p:sp>
+      <p:sp>
+        <p:nvSpPr>
+          <p:cNvPr id="3" name="Notes Placeholder 2"/>
+          <p:cNvSpPr>
+            <a:spLocks noGrp="1"/>
+          </p:cNvSpPr>
+          <p:nvPr>
+            <p:ph type="body" idx="3" sz="quarter"/>
+          </p:nvPr>
+        </p:nvSpPr>
+        <p:spPr/>
+        <p:txBody>
+          <a:bodyPr/>
+          <a:lstStyle/>
+          <a:p>
+            <a:r>
+              <a:t>Въведете темата с въпрос: 'Как мислите, как Facebook пази информацията за вашите акаунти?'</a:t>
+            </a:r>
+          </a:p>
+        </p:txBody>
+      </p:sp>
+      <p:sp>
+        <p:nvSpPr>
+          <p:cNvPr id="4" name="Slide Number Placeholder 3"/>
+          <p:cNvSpPr>
+            <a:spLocks noGrp="1"/>
+          </p:cNvSpPr>
+          <p:nvPr>
+            <p:ph type="sldNum" idx="5" sz="quarter"/>
+          </p:nvPr>
+        </p:nvSpPr>
+        <p:spPr/>
+      </p:sp>
+    </p:spTree>
+  </p:cSld>
+  <p:clrMapOvr>
+    <a:masterClrMapping/>
+  </p:clrMapOvr>
+</p:notes>
+</file>
+
+<file path=ppt/notesSlides/notesSlide12.xml><?xml version="1.0" encoding="utf-8"?>
+<p:notes xmlns:a="http://schemas.openxmlformats.org/drawingml/2006/main" xmlns:p="http://schemas.openxmlformats.org/presentationml/2006/main" xmlns:r="http://schemas.openxmlformats.org/officeDocument/2006/relationships">
+  <p:cSld>
+    <p:spTree>
+      <p:nvGrpSpPr>
+        <p:cNvPr id="1" name=""/>
+        <p:cNvGrpSpPr/>
+        <p:nvPr/>
+      </p:nvGrpSpPr>
+      <p:grpSpPr>
+        <a:xfrm>
+          <a:off x="0" y="0"/>
+          <a:ext cx="0" cy="0"/>
+          <a:chOff x="0" y="0"/>
+          <a:chExt cx="0" cy="0"/>
+        </a:xfrm>
+      </p:grpSpPr>
+      <p:sp>
+        <p:nvSpPr>
+          <p:cNvPr id="2" name="Slide Image Placeholder 1"/>
+          <p:cNvSpPr>
+            <a:spLocks noGrp="1"/>
+          </p:cNvSpPr>
+          <p:nvPr>
+            <p:ph type="sldImg" idx="2"/>
+          </p:nvPr>
+        </p:nvSpPr>
+        <p:spPr/>
+      </p:sp>
+      <p:sp>
+        <p:nvSpPr>
+          <p:cNvPr id="3" name="Notes Placeholder 2"/>
+          <p:cNvSpPr>
+            <a:spLocks noGrp="1"/>
+          </p:cNvSpPr>
+          <p:nvPr>
+            <p:ph type="body" idx="3" sz="quarter"/>
+          </p:nvPr>
+        </p:nvSpPr>
+        <p:spPr/>
+        <p:txBody>
+          <a:bodyPr/>
+          <a:lstStyle/>
+          <a:p>
+            <a:r>
+              <a:t>Нито един подход не е универсално по-добър. Реалните проекти комбинират двата подхода.</a:t>
+            </a:r>
+          </a:p>
+        </p:txBody>
+      </p:sp>
+      <p:sp>
+        <p:nvSpPr>
+          <p:cNvPr id="4" name="Slide Number Placeholder 3"/>
+          <p:cNvSpPr>
+            <a:spLocks noGrp="1"/>
+          </p:cNvSpPr>
+          <p:nvPr>
+            <p:ph type="sldNum" idx="5" sz="quarter"/>
+          </p:nvPr>
+        </p:nvSpPr>
+        <p:spPr/>
+      </p:sp>
+    </p:spTree>
+  </p:cSld>
+  <p:clrMapOvr>
+    <a:masterClrMapping/>
+  </p:clrMapOvr>
+</p:notes>
+</file>
+
+<file path=ppt/notesSlides/notesSlide13.xml><?xml version="1.0" encoding="utf-8"?>
+<p:notes xmlns:a="http://schemas.openxmlformats.org/drawingml/2006/main" xmlns:p="http://schemas.openxmlformats.org/presentationml/2006/main" xmlns:r="http://schemas.openxmlformats.org/officeDocument/2006/relationships">
+  <p:cSld>
+    <p:spTree>
+      <p:nvGrpSpPr>
+        <p:cNvPr id="1" name=""/>
+        <p:cNvGrpSpPr/>
+        <p:nvPr/>
+      </p:nvGrpSpPr>
+      <p:grpSpPr>
+        <a:xfrm>
+          <a:off x="0" y="0"/>
+          <a:ext cx="0" cy="0"/>
+          <a:chOff x="0" y="0"/>
+          <a:chExt cx="0" cy="0"/>
+        </a:xfrm>
+      </p:grpSpPr>
+      <p:sp>
+        <p:nvSpPr>
+          <p:cNvPr id="2" name="Slide Image Placeholder 1"/>
+          <p:cNvSpPr>
+            <a:spLocks noGrp="1"/>
+          </p:cNvSpPr>
+          <p:nvPr>
+            <p:ph type="sldImg" idx="2"/>
+          </p:nvPr>
+        </p:nvSpPr>
+        <p:spPr/>
+      </p:sp>
+      <p:sp>
+        <p:nvSpPr>
+          <p:cNvPr id="3" name="Notes Placeholder 2"/>
+          <p:cNvSpPr>
+            <a:spLocks noGrp="1"/>
+          </p:cNvSpPr>
+          <p:nvPr>
+            <p:ph type="body" idx="3" sz="quarter"/>
+          </p:nvPr>
+        </p:nvSpPr>
+        <p:spPr/>
+        <p:txBody>
+          <a:bodyPr/>
+          <a:lstStyle/>
+          <a:p>
+            <a:r>
+              <a:t>Напишете тези 6 стъпки на дъската.</a:t>
+            </a:r>
+          </a:p>
+        </p:txBody>
+      </p:sp>
+      <p:sp>
+        <p:nvSpPr>
+          <p:cNvPr id="4" name="Slide Number Placeholder 3"/>
+          <p:cNvSpPr>
+            <a:spLocks noGrp="1"/>
+          </p:cNvSpPr>
+          <p:nvPr>
+            <p:ph type="sldNum" idx="5" sz="quarter"/>
+          </p:nvPr>
+        </p:nvSpPr>
+        <p:spPr/>
+      </p:sp>
+    </p:spTree>
   </p:cSld>
   <p:clrMapOvr>
     <a:masterClrMapping/>
@@ -1951,7 +1999,9 @@
           <a:bodyPr/>
           <a:lstStyle/>
           <a:p>
-            <a:endParaRPr lang="en-US"/>
+            <a:r>
+              <a:t>АНАЛОГИЯ: Свързаният модел е като телефонен разговор. Трябва постоянно отворена линия. Проблем: 10000 едновременни потребителя = претоварване на сървъра.</a:t>
+            </a:r>
           </a:p>
         </p:txBody>
       </p:sp>
@@ -2111,7 +2161,9 @@
           <a:bodyPr/>
           <a:lstStyle/>
           <a:p>
-            <a:endParaRPr lang="en-US"/>
+            <a:r>
+              <a:t>АКЦЕНТИРАЙТЕ: Скалирането е голяма слабост на свързания модел. Connection pool в .NET преизползва връзките.</a:t>
+            </a:r>
           </a:p>
         </p:txBody>
       </p:sp>
@@ -2271,7 +2323,9 @@
           <a:bodyPr/>
           <a:lstStyle/>
           <a:p>
-            <a:endParaRPr lang="en-US"/>
+            <a:r>
+              <a:t>АДО.NET = ActiveX Data Objects for .NET. Съществува от .NET 1.0 (2002). Използва се и днес в production системи.</a:t>
+            </a:r>
           </a:p>
         </p:txBody>
       </p:sp>
@@ -2431,7 +2485,9 @@
           <a:bodyPr/>
           <a:lstStyle/>
           <a:p>
-            <a:endParaRPr lang="en-US"/>
+            <a:r>
+              <a:t>Доставчик на данни = 'драйвер' за конкретна БД. Аналогия: USB драйвер - различни устройства, едно USB гнездо.</a:t>
+            </a:r>
           </a:p>
         </p:txBody>
       </p:sp>
@@ -2591,7 +2647,9 @@
           <a:bodyPr/>
           <a:lstStyle/>
           <a:p>
-            <a:endParaRPr lang="en-US"/>
+            <a:r>
+              <a:t>Седем компонента: SqlClient (само SQL Server), OleDB, Odbc, Oracle, MySQL, PostgreSQL, SQLite. Използваме SqlClient.</a:t>
+            </a:r>
           </a:p>
         </p:txBody>
       </p:sp>
@@ -2751,7 +2809,9 @@
           <a:bodyPr/>
           <a:lstStyle/>
           <a:p>
-            <a:endParaRPr lang="en-US"/>
+            <a:r>
+              <a:t>Четири компонента: SqlConnection (отваряме врата) -&gt; SqlCommand (задаваме въпрос) -&gt; SqlDataReader (четем отговора) -&gt; SqlParameter (сигурно подаване).</a:t>
+            </a:r>
           </a:p>
         </p:txBody>
       </p:sp>
@@ -2911,307 +2971,9 @@
           <a:bodyPr/>
           <a:lstStyle/>
           <a:p>
-            <a:pPr lvl="0"/>
-            <a:r>
-              <a:rPr lang="bg-BG" sz="1200" kern="1200" dirty="0" smtClean="0">
-                <a:solidFill>
-                  <a:schemeClr val="tx1"/>
-                </a:solidFill>
-                <a:effectLst/>
-                <a:latin typeface="+mn-lt"/>
-                <a:ea typeface="+mn-ea"/>
-                <a:cs typeface="+mn-cs"/>
-              </a:rPr>
-              <a:t>Модел за достъп до данни, който съпоставя таблиците от базата данни към класове и обекти в програмирането.</a:t>
-            </a:r>
-            <a:endParaRPr lang="bg-BG" sz="1100" kern="1200" dirty="0" smtClean="0">
-              <a:solidFill>
-                <a:schemeClr val="tx1"/>
-              </a:solidFill>
-              <a:effectLst/>
-              <a:latin typeface="+mn-lt"/>
-              <a:ea typeface="+mn-ea"/>
-              <a:cs typeface="+mn-cs"/>
-            </a:endParaRPr>
-          </a:p>
-          <a:p>
-            <a:pPr lvl="0"/>
-            <a:r>
-              <a:rPr lang="bg-BG" sz="1200" b="1" kern="1200" dirty="0" smtClean="0">
-                <a:solidFill>
-                  <a:schemeClr val="tx1"/>
-                </a:solidFill>
-                <a:effectLst/>
-                <a:latin typeface="+mn-lt"/>
-                <a:ea typeface="+mn-ea"/>
-                <a:cs typeface="+mn-cs"/>
-              </a:rPr>
-              <a:t>Обяснение за ученици:</a:t>
-            </a:r>
-            <a:r>
-              <a:rPr lang="bg-BG" sz="1200" kern="1200" dirty="0" smtClean="0">
-                <a:solidFill>
-                  <a:schemeClr val="tx1"/>
-                </a:solidFill>
-                <a:effectLst/>
-                <a:latin typeface="+mn-lt"/>
-                <a:ea typeface="+mn-ea"/>
-                <a:cs typeface="+mn-cs"/>
-              </a:rPr>
-              <a:t> Знаете ли какво е преводач в реално време? ORM е точно това! Базата данни разбира само езика </a:t>
-            </a:r>
-            <a:r>
-              <a:rPr lang="bg-BG" sz="1200" b="1" kern="1200" dirty="0" smtClean="0">
-                <a:solidFill>
-                  <a:schemeClr val="tx1"/>
-                </a:solidFill>
-                <a:effectLst/>
-                <a:latin typeface="+mn-lt"/>
-                <a:ea typeface="+mn-ea"/>
-                <a:cs typeface="+mn-cs"/>
-              </a:rPr>
-              <a:t>SQL</a:t>
-            </a:r>
-            <a:r>
-              <a:rPr lang="bg-BG" sz="1200" kern="1200" dirty="0" smtClean="0">
-                <a:solidFill>
-                  <a:schemeClr val="tx1"/>
-                </a:solidFill>
-                <a:effectLst/>
-                <a:latin typeface="+mn-lt"/>
-                <a:ea typeface="+mn-ea"/>
-                <a:cs typeface="+mn-cs"/>
-              </a:rPr>
-              <a:t> (таблици, редове, колони), а вие искате да пишете на </a:t>
-            </a:r>
-            <a:r>
-              <a:rPr lang="bg-BG" sz="1200" b="1" kern="1200" dirty="0" smtClean="0">
-                <a:solidFill>
-                  <a:schemeClr val="tx1"/>
-                </a:solidFill>
-                <a:effectLst/>
-                <a:latin typeface="+mn-lt"/>
-                <a:ea typeface="+mn-ea"/>
-                <a:cs typeface="+mn-cs"/>
-              </a:rPr>
-              <a:t>C#</a:t>
-            </a:r>
-            <a:r>
-              <a:rPr lang="bg-BG" sz="1200" kern="1200" dirty="0" smtClean="0">
-                <a:solidFill>
-                  <a:schemeClr val="tx1"/>
-                </a:solidFill>
-                <a:effectLst/>
-                <a:latin typeface="+mn-lt"/>
-                <a:ea typeface="+mn-ea"/>
-                <a:cs typeface="+mn-cs"/>
-              </a:rPr>
-              <a:t> (класове, обекти, списъци).</a:t>
-            </a:r>
-            <a:endParaRPr lang="bg-BG" sz="1100" kern="1200" dirty="0" smtClean="0">
-              <a:solidFill>
-                <a:schemeClr val="tx1"/>
-              </a:solidFill>
-              <a:effectLst/>
-              <a:latin typeface="+mn-lt"/>
-              <a:ea typeface="+mn-ea"/>
-              <a:cs typeface="+mn-cs"/>
-            </a:endParaRPr>
-          </a:p>
-          <a:p>
-            <a:pPr lvl="1"/>
-            <a:r>
-              <a:rPr lang="bg-BG" sz="1800" kern="1200" dirty="0" smtClean="0">
-                <a:solidFill>
-                  <a:schemeClr val="tx1"/>
-                </a:solidFill>
-                <a:effectLst/>
-                <a:latin typeface="+mn-lt"/>
-                <a:ea typeface="+mn-ea"/>
-                <a:cs typeface="+mn-cs"/>
-              </a:rPr>
-              <a:t>Вместо да пишете дълъг и сложен SQL код като </a:t>
-            </a:r>
-            <a:r>
-              <a:rPr lang="bg-BG" sz="1200" kern="1200" dirty="0" smtClean="0">
-                <a:solidFill>
-                  <a:schemeClr val="tx1"/>
-                </a:solidFill>
-                <a:effectLst/>
-                <a:latin typeface="+mn-lt"/>
-                <a:ea typeface="+mn-ea"/>
-                <a:cs typeface="+mn-cs"/>
-              </a:rPr>
-              <a:t>INSERT INTO Students (Name, Age) VALUES ('Ivan', 16);</a:t>
-            </a:r>
-            <a:r>
-              <a:rPr lang="bg-BG" sz="1800" kern="1200" dirty="0" smtClean="0">
-                <a:solidFill>
-                  <a:schemeClr val="tx1"/>
-                </a:solidFill>
-                <a:effectLst/>
-                <a:latin typeface="+mn-lt"/>
-                <a:ea typeface="+mn-ea"/>
-                <a:cs typeface="+mn-cs"/>
-              </a:rPr>
-              <a:t>...</a:t>
-            </a:r>
-            <a:endParaRPr lang="bg-BG" sz="1600" kern="1200" dirty="0" smtClean="0">
-              <a:solidFill>
-                <a:schemeClr val="tx1"/>
-              </a:solidFill>
-              <a:effectLst/>
-              <a:latin typeface="+mn-lt"/>
-              <a:ea typeface="+mn-ea"/>
-              <a:cs typeface="+mn-cs"/>
-            </a:endParaRPr>
-          </a:p>
-          <a:p>
-            <a:pPr lvl="1"/>
-            <a:r>
-              <a:rPr lang="bg-BG" sz="1200" kern="1200" dirty="0" smtClean="0">
-                <a:solidFill>
-                  <a:schemeClr val="tx1"/>
-                </a:solidFill>
-                <a:effectLst/>
-                <a:latin typeface="+mn-lt"/>
-                <a:ea typeface="+mn-ea"/>
-                <a:cs typeface="+mn-cs"/>
-              </a:rPr>
-              <a:t>...вие просто създавате обект в C#: </a:t>
-            </a:r>
-            <a:r>
-              <a:rPr lang="bg-BG" sz="1000" kern="1200" dirty="0" smtClean="0">
-                <a:solidFill>
-                  <a:schemeClr val="tx1"/>
-                </a:solidFill>
-                <a:effectLst/>
-                <a:latin typeface="+mn-lt"/>
-                <a:ea typeface="+mn-ea"/>
-                <a:cs typeface="+mn-cs"/>
-              </a:rPr>
-              <a:t>Student ivan = new Student("Ivan", 16);</a:t>
-            </a:r>
-            <a:r>
-              <a:rPr lang="bg-BG" sz="1200" kern="1200" dirty="0" smtClean="0">
-                <a:solidFill>
-                  <a:schemeClr val="tx1"/>
-                </a:solidFill>
-                <a:effectLst/>
-                <a:latin typeface="+mn-lt"/>
-                <a:ea typeface="+mn-ea"/>
-                <a:cs typeface="+mn-cs"/>
-              </a:rPr>
-              <a:t> и казвате </a:t>
-            </a:r>
-            <a:r>
-              <a:rPr lang="bg-BG" sz="1000" kern="1200" dirty="0" smtClean="0">
-                <a:solidFill>
-                  <a:schemeClr val="tx1"/>
-                </a:solidFill>
-                <a:effectLst/>
-                <a:latin typeface="+mn-lt"/>
-                <a:ea typeface="+mn-ea"/>
-                <a:cs typeface="+mn-cs"/>
-              </a:rPr>
-              <a:t>Save()</a:t>
-            </a:r>
-            <a:r>
-              <a:rPr lang="bg-BG" sz="1200" kern="1200" dirty="0" smtClean="0">
-                <a:solidFill>
-                  <a:schemeClr val="tx1"/>
-                </a:solidFill>
-                <a:effectLst/>
-                <a:latin typeface="+mn-lt"/>
-                <a:ea typeface="+mn-ea"/>
-                <a:cs typeface="+mn-cs"/>
-              </a:rPr>
-              <a:t>. ORM автоматично превежда това на SQL и го записва в базата.</a:t>
-            </a:r>
-            <a:endParaRPr lang="bg-BG" sz="1100" kern="1200" dirty="0" smtClean="0">
-              <a:solidFill>
-                <a:schemeClr val="tx1"/>
-              </a:solidFill>
-              <a:effectLst/>
-              <a:latin typeface="+mn-lt"/>
-              <a:ea typeface="+mn-ea"/>
-              <a:cs typeface="+mn-cs"/>
-            </a:endParaRPr>
-          </a:p>
-          <a:p>
-            <a:pPr lvl="1"/>
-            <a:r>
-              <a:rPr lang="bg-BG" sz="1200" b="1" kern="1200" dirty="0" smtClean="0">
-                <a:solidFill>
-                  <a:schemeClr val="tx1"/>
-                </a:solidFill>
-                <a:effectLst/>
-                <a:latin typeface="+mn-lt"/>
-                <a:ea typeface="+mn-ea"/>
-                <a:cs typeface="+mn-cs"/>
-              </a:rPr>
-              <a:t>Предимства:</a:t>
-            </a:r>
-            <a:r>
-              <a:rPr lang="bg-BG" sz="1200" kern="1200" dirty="0" smtClean="0">
-                <a:solidFill>
-                  <a:schemeClr val="tx1"/>
-                </a:solidFill>
-                <a:effectLst/>
-                <a:latin typeface="+mn-lt"/>
-                <a:ea typeface="+mn-ea"/>
-                <a:cs typeface="+mn-cs"/>
-              </a:rPr>
-              <a:t> Пишете много по-малко код и работите с познатите ви обекти.</a:t>
-            </a:r>
-            <a:endParaRPr lang="bg-BG" sz="1100" kern="1200" dirty="0" smtClean="0">
-              <a:solidFill>
-                <a:schemeClr val="tx1"/>
-              </a:solidFill>
-              <a:effectLst/>
-              <a:latin typeface="+mn-lt"/>
-              <a:ea typeface="+mn-ea"/>
-              <a:cs typeface="+mn-cs"/>
-            </a:endParaRPr>
-          </a:p>
-          <a:p>
-            <a:pPr lvl="1"/>
-            <a:r>
-              <a:rPr lang="bg-BG" sz="1200" b="1" kern="1200" dirty="0" smtClean="0">
-                <a:solidFill>
-                  <a:schemeClr val="tx1"/>
-                </a:solidFill>
-                <a:effectLst/>
-                <a:latin typeface="+mn-lt"/>
-                <a:ea typeface="+mn-ea"/>
-                <a:cs typeface="+mn-cs"/>
-              </a:rPr>
-              <a:t>Недостатъци:</a:t>
-            </a:r>
-            <a:r>
-              <a:rPr lang="bg-BG" sz="1200" kern="1200" dirty="0" smtClean="0">
-                <a:solidFill>
-                  <a:schemeClr val="tx1"/>
-                </a:solidFill>
-                <a:effectLst/>
-                <a:latin typeface="+mn-lt"/>
-                <a:ea typeface="+mn-ea"/>
-                <a:cs typeface="+mn-cs"/>
-              </a:rPr>
-              <a:t> Тъй като преводът е автоматичен (SQL кодът се генерира автоматично), понякога той не е най-бързият или най-оптималният (не винаги ефикасен откъм производителност).</a:t>
-            </a:r>
-            <a:endParaRPr lang="bg-BG" sz="1100" kern="1200" dirty="0" smtClean="0">
-              <a:solidFill>
-                <a:schemeClr val="tx1"/>
-              </a:solidFill>
-              <a:effectLst/>
-              <a:latin typeface="+mn-lt"/>
-              <a:ea typeface="+mn-ea"/>
-              <a:cs typeface="+mn-cs"/>
-            </a:endParaRPr>
-          </a:p>
-          <a:p>
-            <a:endParaRPr lang="en-US" dirty="0"/>
+            <a:r>
+              <a:t>АНАЛОГИЯ: ORM е преводач между C# и SQL. Въпрос към класа: Какви са недостатъците на автоматичния превод?</a:t>
+            </a:r>
           </a:p>
         </p:txBody>
       </p:sp>
@@ -3371,7 +3133,9 @@
           <a:bodyPr/>
           <a:lstStyle/>
           <a:p>
-            <a:endParaRPr lang="en-US"/>
+            <a:r>
+              <a:t>Н+1 проблем: зареждаме 100 служители, за всеки достъпваме department.Name = 100 SQL заявки! Решение: .Include() - eager loading.</a:t>
+            </a:r>
           </a:p>
         </p:txBody>
       </p:sp>
@@ -8639,6 +8403,181 @@
         <p14:creationId xmlns:p14="http://schemas.microsoft.com/office/powerpoint/2010/main" val="1241344677"/>
       </p:ext>
     </p:extLst>
+  </p:cSld>
+  <p:clrMapOvr>
+    <a:masterClrMapping/>
+  </p:clrMapOvr>
+</p:sld>
+</file>
+
+<file path=ppt/slides/slide14.xml><?xml version="1.0" encoding="utf-8"?>
+<p:sld xmlns:a="http://schemas.openxmlformats.org/drawingml/2006/main" xmlns:p="http://schemas.openxmlformats.org/presentationml/2006/main" xmlns:r="http://schemas.openxmlformats.org/officeDocument/2006/relationships">
+  <p:cSld>
+    <p:spTree>
+      <p:nvGrpSpPr>
+        <p:cNvPr id="1" name=""/>
+        <p:cNvGrpSpPr/>
+        <p:nvPr/>
+      </p:nvGrpSpPr>
+      <p:grpSpPr/>
+      <p:sp>
+        <p:nvSpPr>
+          <p:cNvPr id="2" name="Title 1"/>
+          <p:cNvSpPr>
+            <a:spLocks noGrp="1"/>
+          </p:cNvSpPr>
+          <p:nvPr>
+            <p:ph type="title"/>
+          </p:nvPr>
+        </p:nvSpPr>
+        <p:spPr/>
+        <p:txBody>
+          <a:bodyPr/>
+          <a:lstStyle/>
+          <a:p>
+            <a:r>
+              <a:t>ADO.NET vs ORM — Кога какво?</a:t>
+            </a:r>
+          </a:p>
+        </p:txBody>
+      </p:sp>
+      <p:sp>
+        <p:nvSpPr>
+          <p:cNvPr id="3" name="Content Placeholder 2"/>
+          <p:cNvSpPr>
+            <a:spLocks noGrp="1"/>
+          </p:cNvSpPr>
+          <p:nvPr>
+            <p:ph idx="1"/>
+          </p:nvPr>
+        </p:nvSpPr>
+        <p:spPr/>
+        <p:txBody>
+          <a:bodyPr/>
+          <a:lstStyle/>
+          <a:p>
+            <a:r>
+              <a:t>ADO.NET: Критични системи, банки, голям трафик</a:t>
+            </a:r>
+          </a:p>
+          <a:p>
+            <a:r>
+              <a:t>ADO.NET: Пълен контрол над SQL заявките</a:t>
+            </a:r>
+          </a:p>
+          <a:p>
+            <a:r>
+              <a:t>ORM (EFC): Бизнес приложения, бърза разработка</a:t>
+            </a:r>
+          </a:p>
+          <a:p>
+            <a:r>
+              <a:t>ORM: По-четим код, по-лесна поддръжка</a:t>
+            </a:r>
+          </a:p>
+          <a:p>
+            <a:r>
+              <a:t>ORM: Подходящ при често промяняща схема (migrations)</a:t>
+            </a:r>
+          </a:p>
+          <a:p>
+            <a:r>
+              <a:t>Правило: Започнете с ORM, оптимизирайте с ADO.NET само проблемните места</a:t>
+            </a:r>
+          </a:p>
+        </p:txBody>
+      </p:sp>
+    </p:spTree>
+  </p:cSld>
+  <p:clrMapOvr>
+    <a:masterClrMapping/>
+  </p:clrMapOvr>
+</p:sld>
+</file>
+
+<file path=ppt/slides/slide15.xml><?xml version="1.0" encoding="utf-8"?>
+<p:sld xmlns:a="http://schemas.openxmlformats.org/drawingml/2006/main" xmlns:p="http://schemas.openxmlformats.org/presentationml/2006/main" xmlns:r="http://schemas.openxmlformats.org/officeDocument/2006/relationships">
+  <p:cSld>
+    <p:spTree>
+      <p:nvGrpSpPr>
+        <p:cNvPr id="1" name=""/>
+        <p:cNvGrpSpPr/>
+        <p:nvPr/>
+      </p:nvGrpSpPr>
+      <p:grpSpPr/>
+      <p:sp>
+        <p:nvSpPr>
+          <p:cNvPr id="2" name="Title 1"/>
+          <p:cNvSpPr>
+            <a:spLocks noGrp="1"/>
+          </p:cNvSpPr>
+          <p:nvPr>
+            <p:ph type="title"/>
+          </p:nvPr>
+        </p:nvSpPr>
+        <p:spPr/>
+        <p:txBody>
+          <a:bodyPr/>
+          <a:lstStyle/>
+          <a:p>
+            <a:r>
+              <a:t>Стъпки за свързване — Обобщение</a:t>
+            </a:r>
+          </a:p>
+        </p:txBody>
+      </p:sp>
+      <p:sp>
+        <p:nvSpPr>
+          <p:cNvPr id="3" name="Content Placeholder 2"/>
+          <p:cNvSpPr>
+            <a:spLocks noGrp="1"/>
+          </p:cNvSpPr>
+          <p:nvPr>
+            <p:ph idx="1"/>
+          </p:nvPr>
+        </p:nvSpPr>
+        <p:spPr/>
+        <p:txBody>
+          <a:bodyPr/>
+          <a:lstStyle/>
+          <a:p>
+            <a:r>
+              <a:t>1. ИНСТАЛИРАЙ: NuGet пакет</a:t>
+            </a:r>
+          </a:p>
+          <a:p>
+            <a:r>
+              <a:t>2. КОНФИГУРИРАЙ: connection string</a:t>
+            </a:r>
+          </a:p>
+          <a:p>
+            <a:r>
+              <a:t>3. СВЪРЖИ: new SqlConnection() + .Open()</a:t>
+            </a:r>
+          </a:p>
+          <a:p>
+            <a:r>
+              <a:t>4. ИЗПЪЛНИ: SqlCommand с SQL заявка</a:t>
+            </a:r>
+          </a:p>
+          <a:p>
+            <a:r>
+              <a:t>5. ПРОЧЕТИ: SqlDataReader.Read() в цикъл</a:t>
+            </a:r>
+          </a:p>
+          <a:p>
+            <a:r>
+              <a:t>6. ЗАТВОРИ: using {} блок — автоматично</a:t>
+            </a:r>
+          </a:p>
+          <a:p>
+            <a:r>
+              <a:t>ВИНАГИ: ВИНАГИ използвайте using {} за SqlConnection!</a:t>
+            </a:r>
+          </a:p>
+        </p:txBody>
+      </p:sp>
+    </p:spTree>
   </p:cSld>
   <p:clrMapOvr>
     <a:masterClrMapping/>
